--- a/Poster_KID_LESSON_AI_A0.pptx
+++ b/Poster_KID_LESSON_AI_A0.pptx
@@ -7,7 +7,7 @@
   <p:sldIdLst>
     <p:sldId id="256" r:id="rId7"/>
   </p:sldIdLst>
-  <p:sldSz cx="21945600" cy="32918400" type="screen4x3"/>
+  <p:sldSz cx="27540000" cy="31140000" type="screen4x3"/>
   <p:notesSz cx="6858000" cy="9144000"/>
   <p:defaultTextStyle>
     <a:defPPr>
@@ -3097,7 +3097,7 @@
         <p:spPr>
           <a:xfrm>
             <a:off x="0" y="0"/>
-            <a:ext cx="21945600" cy="32918400"/>
+            <a:ext cx="27540000" cy="31140000"/>
           </a:xfrm>
           <a:prstGeom prst="rect">
             <a:avLst/>
@@ -3141,18 +3141,18 @@
         </p:nvSpPr>
         <p:spPr>
           <a:xfrm>
-            <a:off x="731520" y="731520"/>
-            <a:ext cx="20482560" cy="3931920"/>
+            <a:off x="540000" y="432000"/>
+            <a:ext cx="26460000" cy="4031999"/>
           </a:xfrm>
           <a:prstGeom prst="roundRect">
             <a:avLst/>
           </a:prstGeom>
           <a:solidFill>
-            <a:srgbClr val="0F172A"/>
+            <a:srgbClr val="1E1B4B"/>
           </a:solidFill>
           <a:ln w="38100">
             <a:solidFill>
-              <a:srgbClr val="0284C7"/>
+              <a:srgbClr val="F59E0B"/>
             </a:solidFill>
           </a:ln>
         </p:spPr>
@@ -3171,14 +3171,14 @@
           </a:fontRef>
         </p:style>
         <p:txBody>
-          <a:bodyPr rtlCol="0" anchor="ctr" wrap="square" lIns="457200" rIns="457200"/>
+          <a:bodyPr rtlCol="0" anchor="ctr" wrap="square" lIns="432000" rIns="432000"/>
           <a:lstStyle/>
           <a:p>
             <a:pPr algn="ctr">
               <a:spcAft>
-                <a:spcPts val="800"/>
+                <a:spcPts val="300"/>
               </a:spcAft>
-              <a:defRPr sz="1400" b="1">
+              <a:defRPr sz="1300" b="1">
                 <a:solidFill>
                   <a:srgbClr val="F59E0B"/>
                 </a:solidFill>
@@ -3186,15 +3186,15 @@
               </a:defRPr>
             </a:pPr>
             <a:r>
-              <a:t>DIỄN ĐÀN ĐỔI MỚI SÁNG TẠO GIÁO DỤC VIỆT NAM VỚI TRÍ TUỆ NHÂN TẠO 2026  •  BỘ GD&amp;ĐT &amp; ĐẠI HỌC RMIT</a:t>
+              <a:t>DIỄN ĐÀN ĐỔI MỚI SÁNG TẠO GIÁO DỤC VIỆT NAM VỚI TRÍ TUỆ NHÂN TẠO • GIẢI THƯỞNG TIÊN PHONG ỨNG DỤNG AI TRONG GIÁO DỤC VIỆT NAM 2026</a:t>
             </a:r>
           </a:p>
           <a:p>
             <a:pPr algn="ctr">
               <a:spcAft>
-                <a:spcPts val="800"/>
+                <a:spcPts val="400"/>
               </a:spcAft>
-              <a:defRPr sz="2600" b="1">
+              <a:defRPr sz="2100" b="1">
                 <a:solidFill>
                   <a:srgbClr val="FFFFFF"/>
                 </a:solidFill>
@@ -3202,40 +3202,40 @@
               </a:defRPr>
             </a:pPr>
             <a:r>
-              <a:t>KID-LESSON AI: HỆ THỐNG TRỢ LÝ TRÍ TUỆ NHÂN TẠO TẠO SINH TRONG XÂY DỰNG</a:t>
+              <a:t>KID-LESSON AI</a:t>
             </a:r>
             <a:br/>
             <a:r>
-              <a:t>KẾ HOẠCH BÀI DẠY (GIÁO ÁN) ĐIỆN TỬ VÀ KHO HỌC LIỆU SỐ ĐA PHƯƠNG TIỆN</a:t>
+              <a:t>HỆ THỐNG TRỢ LÝ TRÍ TUỆ NHÂN TẠO TẠO SINH TRONG XÂY DỰNG KẾ HOẠCH BÀI DẠY (GIÁO ÁN) ĐIỆN TỬ VÀ KHO HỌC LIỆU SỐ ĐA PHƯƠNG TIỆN CHO GIÁO VIÊN MẦM NON</a:t>
             </a:r>
           </a:p>
           <a:p>
             <a:pPr algn="ctr">
               <a:spcAft>
-                <a:spcPts val="800"/>
+                <a:spcPts val="300"/>
               </a:spcAft>
-              <a:defRPr sz="1500">
-                <a:solidFill>
-                  <a:srgbClr val="0284C7"/>
+              <a:defRPr sz="1300" b="1">
+                <a:solidFill>
+                  <a:srgbClr val="A5B4FC"/>
                 </a:solidFill>
                 <a:latin typeface="Arial"/>
               </a:defRPr>
             </a:pPr>
             <a:r>
-              <a:t>★ GIẢI PHÓNG SỨC LAO ĐỘNG NHÀ GIÁO  •  KHƠI NGUỒN SÁNG TẠO BÀI GIẢNG MẦM NON ★</a:t>
+              <a:t>★ GIẢI PHÓNG SỨC LAO ĐỘNG NHÀ GIÁO - KHƠI NGUỒN SÁNG TẠO BÀI GIẢNG MẦM NON CÙNG AI ★</a:t>
             </a:r>
           </a:p>
           <a:p>
             <a:pPr algn="ctr">
-              <a:defRPr sz="1300">
-                <a:solidFill>
-                  <a:srgbClr val="64748B"/>
+              <a:defRPr sz="1150">
+                <a:solidFill>
+                  <a:srgbClr val="E2E8F0"/>
                 </a:solidFill>
                 <a:latin typeface="Arial"/>
               </a:defRPr>
             </a:pPr>
             <a:r>
-              <a:t>Đơn vị: Trường Mầm non Phúc Sơn B  |  Tác giả: Giáo viên chủ trì &amp; Tổ Chuyên môn  |  Phân bảng A: Mầm non &amp; Tiểu học</a:t>
+              <a:t>Giáo viên thực hiện: Nguyễn Thị Tiên  |  Đơn vị: Trường Mầm non Phúc Sơn B (Thôn Đồng Mít, xã Phúc Sơn, TP. Hà Nội)  |  Email: tienmamnondongtam@gmail.com</a:t>
             </a:r>
           </a:p>
         </p:txBody>
@@ -3248,8 +3248,8 @@
         </p:nvSpPr>
         <p:spPr>
           <a:xfrm>
-            <a:off x="731520" y="4937760"/>
-            <a:ext cx="6583680" cy="27066240"/>
+            <a:off x="540000" y="4680000"/>
+            <a:ext cx="8424000" cy="23940000"/>
           </a:xfrm>
           <a:prstGeom prst="roundRect">
             <a:avLst/>
@@ -3259,7 +3259,7 @@
           </a:solidFill>
           <a:ln>
             <a:solidFill>
-              <a:srgbClr val="E2E8F0"/>
+              <a:srgbClr val="CBD5E1"/>
             </a:solidFill>
           </a:ln>
         </p:spPr>
@@ -3278,122 +3278,295 @@
           </a:fontRef>
         </p:style>
         <p:txBody>
-          <a:bodyPr rtlCol="0" anchor="ctr" wrap="square" lIns="365760" rIns="365760" tIns="365760"/>
+          <a:bodyPr rtlCol="0" anchor="ctr" wrap="square" lIns="324000" rIns="324000" tIns="324000"/>
           <a:lstStyle/>
           <a:p>
             <a:pPr algn="ctr">
               <a:spcAft>
-                <a:spcPts val="1400"/>
+                <a:spcPts val="800"/>
               </a:spcAft>
-              <a:defRPr sz="1800" b="1">
-                <a:solidFill>
-                  <a:srgbClr val="0284C7"/>
+              <a:defRPr sz="1400" b="1">
+                <a:solidFill>
+                  <a:srgbClr val="4338CA"/>
                 </a:solidFill>
                 <a:latin typeface="Arial"/>
               </a:defRPr>
             </a:pPr>
             <a:r>
-              <a:t>I. BỐI CẢNH &amp; NỖI ĐAU SƯ PHẠM</a:t>
+              <a:t>MỤC TIÊU, BỐI CẢNH &amp; Ý TƯỞNG GIẢI PHÁP</a:t>
             </a:r>
           </a:p>
           <a:p>
             <a:pPr>
               <a:spcAft>
-                <a:spcPts val="1200"/>
+                <a:spcPts val="400"/>
               </a:spcAft>
             </a:pPr>
             <a:r>
-              <a:rPr b="1" sz="1300">
-                <a:solidFill>
-                  <a:srgbClr val="1E293B"/>
-                </a:solidFill>
-                <a:latin typeface="Arial"/>
-              </a:rPr>
-              <a:t>• Quá tải thời gian soạn bài:</a:t>
-            </a:r>
-            <a:r>
-              <a:rPr sz="1300">
-                <a:solidFill>
-                  <a:srgbClr val="1E293B"/>
-                </a:solidFill>
-                <a:latin typeface="Arial"/>
-              </a:rPr>
-              <a:t> Giáo viên mầm non mất 12-15h mỗi tuần chỉ để gõ 10-15 giáo án chi tiết và tự chuẩn bị đồ dùng dạy học thủ công.</a:t>
+              <a:rPr b="1" sz="1000">
+                <a:solidFill>
+                  <a:srgbClr val="0284C7"/>
+                </a:solidFill>
+                <a:latin typeface="Arial"/>
+              </a:rPr>
+              <a:t>MỤC TIÊU TRỌNG TÂM &amp; PHÁP LÝ (Trang 3):</a:t>
             </a:r>
           </a:p>
           <a:p>
             <a:pPr>
               <a:spcAft>
-                <a:spcPts val="1200"/>
+                <a:spcPts val="400"/>
               </a:spcAft>
             </a:pPr>
             <a:r>
-              <a:rPr b="1" sz="1300">
-                <a:solidFill>
-                  <a:srgbClr val="1E293B"/>
-                </a:solidFill>
-                <a:latin typeface="Arial"/>
-              </a:rPr>
-              <a:t>• Giáo án rập khuôn, sao chép:</a:t>
-            </a:r>
-            <a:r>
-              <a:rPr sz="1300">
-                <a:solidFill>
-                  <a:srgbClr val="1E293B"/>
-                </a:solidFill>
-                <a:latin typeface="Arial"/>
-              </a:rPr>
-              <a:t> Do áp lực thời gian, nhiều giáo viên phải tải giáo án cũ trên mạng với câu từ sáo rỗng, không phù hợp tâm lý trẻ em địa phương.</a:t>
+              <a:rPr b="1" sz="1000">
+                <a:solidFill>
+                  <a:srgbClr val="0284C7"/>
+                </a:solidFill>
+                <a:latin typeface="Arial"/>
+              </a:rPr>
+              <a:t>• Mục tiêu trọng tâm:</a:t>
+            </a:r>
+            <a:r>
+              <a:rPr sz="950">
+                <a:solidFill>
+                  <a:srgbClr val="0F172A"/>
+                </a:solidFill>
+                <a:latin typeface="Arial"/>
+              </a:rPr>
+              <a:t> Tự động hóa 80% quy trình soạn giáo án &amp; sản xuất học liệu số (thơ, câu đố, ảnh hoạt họa, trò chơi tương tác).</a:t>
             </a:r>
           </a:p>
           <a:p>
             <a:pPr>
               <a:spcAft>
-                <a:spcPts val="1200"/>
+                <a:spcPts val="400"/>
               </a:spcAft>
             </a:pPr>
             <a:r>
-              <a:rPr b="1" sz="1300">
-                <a:solidFill>
-                  <a:srgbClr val="1E293B"/>
-                </a:solidFill>
-                <a:latin typeface="Arial"/>
-              </a:rPr>
-              <a:t>• Thiếu thốn học liệu trực quan:</a:t>
-            </a:r>
-            <a:r>
-              <a:rPr sz="1300">
-                <a:solidFill>
-                  <a:srgbClr val="1E293B"/>
-                </a:solidFill>
-                <a:latin typeface="Arial"/>
-              </a:rPr>
-              <a:t> Trường mầm non nông thôn thiếu kinh phí mua sắm đồ dùng số; trẻ học thụ động, dễ phân tán chú ý và nhanh chán.</a:t>
+              <a:rPr b="1" sz="1000">
+                <a:solidFill>
+                  <a:srgbClr val="0284C7"/>
+                </a:solidFill>
+                <a:latin typeface="Arial"/>
+              </a:rPr>
+              <a:t>• Tính sư phạm pháp lý:</a:t>
+            </a:r>
+            <a:r>
+              <a:rPr sz="950">
+                <a:solidFill>
+                  <a:srgbClr val="0F172A"/>
+                </a:solidFill>
+                <a:latin typeface="Arial"/>
+              </a:rPr>
+              <a:t> Chuẩn 100% Chương trình GDMN ban hành kèm Thông tư 51/2020/TT-BGDĐT của Bộ GD&amp;ĐT.</a:t>
             </a:r>
           </a:p>
           <a:p>
             <a:pPr>
               <a:spcAft>
-                <a:spcPts val="1200"/>
+                <a:spcPts val="400"/>
               </a:spcAft>
             </a:pPr>
             <a:r>
-              <a:rPr b="1" sz="1300">
-                <a:solidFill>
-                  <a:srgbClr val="1E293B"/>
-                </a:solidFill>
-                <a:latin typeface="Arial"/>
-              </a:rPr>
-              <a:t>• Mục tiêu sáng kiến:</a:t>
-            </a:r>
-            <a:r>
-              <a:rPr sz="1300">
-                <a:solidFill>
-                  <a:srgbClr val="1E293B"/>
-                </a:solidFill>
-                <a:latin typeface="Arial"/>
-              </a:rPr>
-              <a:t> Giảm 80% thời gian soạn bài, cung cấp kho học liệu tranh ảnh và thơ ca 0 đồng, nâng cao chất lượng bài giảng lấy trẻ làm trung tâm.</a:t>
+              <a:rPr b="1" sz="1000">
+                <a:solidFill>
+                  <a:srgbClr val="0284C7"/>
+                </a:solidFill>
+                <a:latin typeface="Arial"/>
+              </a:rPr>
+              <a:t>• Thông điệp cốt lõi:</a:t>
+            </a:r>
+            <a:r>
+              <a:rPr sz="950">
+                <a:solidFill>
+                  <a:srgbClr val="0F172A"/>
+                </a:solidFill>
+                <a:latin typeface="Arial"/>
+              </a:rPr>
+              <a:t> AI không thay thế người thầy, mà trao quyền cho cô giáo dành trọn thời gian chăm sóc, giáo dục trẻ.</a:t>
+            </a:r>
+          </a:p>
+          <a:p>
+            <a:pPr>
+              <a:spcAft>
+                <a:spcPts val="400"/>
+              </a:spcAft>
+            </a:pPr>
+            <a:r>
+              <a:rPr b="1" sz="1000">
+                <a:solidFill>
+                  <a:srgbClr val="0284C7"/>
+                </a:solidFill>
+                <a:latin typeface="Arial"/>
+              </a:rPr>
+              <a:t>PHẦN 1: BỐI CẢNH VÀ VẤN ĐỀ THỰC TIỄN (Trang 4):</a:t>
+            </a:r>
+          </a:p>
+          <a:p>
+            <a:pPr>
+              <a:spcAft>
+                <a:spcPts val="400"/>
+              </a:spcAft>
+            </a:pPr>
+            <a:r>
+              <a:rPr b="1" sz="1000">
+                <a:solidFill>
+                  <a:srgbClr val="E11D48"/>
+                </a:solidFill>
+                <a:latin typeface="Arial"/>
+              </a:rPr>
+              <a:t>• Thách thức 1 (Sổ sách):</a:t>
+            </a:r>
+            <a:r>
+              <a:rPr sz="950">
+                <a:solidFill>
+                  <a:srgbClr val="0F172A"/>
+                </a:solidFill>
+                <a:latin typeface="Arial"/>
+              </a:rPr>
+              <a:t> Theo dõi 25–35 trẻ/ngày theo 5 lĩnh vực; mất 8–12 giờ/tuần ngoài giờ chỉ để ghi chép.</a:t>
+            </a:r>
+          </a:p>
+          <a:p>
+            <a:pPr>
+              <a:spcAft>
+                <a:spcPts val="400"/>
+              </a:spcAft>
+            </a:pPr>
+            <a:r>
+              <a:rPr b="1" sz="1000">
+                <a:solidFill>
+                  <a:srgbClr val="E11D48"/>
+                </a:solidFill>
+                <a:latin typeface="Arial"/>
+              </a:rPr>
+              <a:t>• Thách thức 2 (Rập khuôn):</a:t>
+            </a:r>
+            <a:r>
+              <a:rPr sz="950">
+                <a:solidFill>
+                  <a:srgbClr val="0F172A"/>
+                </a:solidFill>
+                <a:latin typeface="Arial"/>
+              </a:rPr>
+              <a:t> Áp lực thời gian khiến nhiều GV sao chép giáo án cũ trên mạng; thiếu sáng tạo, chưa sát thực tế.</a:t>
+            </a:r>
+          </a:p>
+          <a:p>
+            <a:pPr>
+              <a:spcAft>
+                <a:spcPts val="400"/>
+              </a:spcAft>
+            </a:pPr>
+            <a:r>
+              <a:rPr b="1" sz="1000">
+                <a:solidFill>
+                  <a:srgbClr val="E11D48"/>
+                </a:solidFill>
+                <a:latin typeface="Arial"/>
+              </a:rPr>
+              <a:t>• Thách thức 3 (Rào cản số):</a:t>
+            </a:r>
+            <a:r>
+              <a:rPr sz="950">
+                <a:solidFill>
+                  <a:srgbClr val="0F172A"/>
+                </a:solidFill>
+                <a:latin typeface="Arial"/>
+              </a:rPr>
+              <a:t> Có đủ thiết bị truyền thống nhưng chuyển sang bài giảng số đa phương tiện Smart TV vẫn là thách thức lớn.</a:t>
+            </a:r>
+          </a:p>
+          <a:p>
+            <a:pPr>
+              <a:spcAft>
+                <a:spcPts val="400"/>
+              </a:spcAft>
+            </a:pPr>
+            <a:r>
+              <a:rPr b="1" sz="1000">
+                <a:solidFill>
+                  <a:srgbClr val="0284C7"/>
+                </a:solidFill>
+                <a:latin typeface="Arial"/>
+              </a:rPr>
+              <a:t>PHẦN 2: Ý TƯỞNG VÀ GIẢI PHÁP (3 TRỤ CỘT - Trang 5):</a:t>
+            </a:r>
+          </a:p>
+          <a:p>
+            <a:pPr>
+              <a:spcAft>
+                <a:spcPts val="400"/>
+              </a:spcAft>
+            </a:pPr>
+            <a:r>
+              <a:rPr b="1" sz="1000">
+                <a:solidFill>
+                  <a:srgbClr val="0284C7"/>
+                </a:solidFill>
+                <a:latin typeface="Arial"/>
+              </a:rPr>
+              <a:t>★ TRỤ CỘT 1 (Soạn giáo án chuẩn TT 51):</a:t>
+            </a:r>
+            <a:r>
+              <a:rPr sz="950">
+                <a:solidFill>
+                  <a:srgbClr val="0F172A"/>
+                </a:solidFill>
+                <a:latin typeface="Arial"/>
+              </a:rPr>
+              <a:t> Prompt Master bám sát 3 mục tiêu &amp; tiến trình 3 bước; tự động xuất Word trong 30 giây.</a:t>
+            </a:r>
+          </a:p>
+          <a:p>
+            <a:pPr>
+              <a:spcAft>
+                <a:spcPts val="400"/>
+              </a:spcAft>
+            </a:pPr>
+            <a:r>
+              <a:rPr b="1" sz="1000">
+                <a:solidFill>
+                  <a:srgbClr val="0284C7"/>
+                </a:solidFill>
+                <a:latin typeface="Arial"/>
+              </a:rPr>
+              <a:t>★ TRỤ CỘT 2 (Slide Canva &amp; Smart TV 0đ):</a:t>
+            </a:r>
+            <a:r>
+              <a:rPr sz="950">
+                <a:solidFill>
+                  <a:srgbClr val="0F172A"/>
+                </a:solidFill>
+                <a:latin typeface="Arial"/>
+              </a:rPr>
+              <a:t> Tự động tạo bộ Slide 16:9 kéo thả Canva 1-click; hỗ trợ trình chiếu offline lớp học trên Smart TV.</a:t>
+            </a:r>
+          </a:p>
+          <a:p>
+            <a:pPr>
+              <a:spcAft>
+                <a:spcPts val="400"/>
+              </a:spcAft>
+            </a:pPr>
+            <a:r>
+              <a:rPr b="1" sz="1000">
+                <a:solidFill>
+                  <a:srgbClr val="0284C7"/>
+                </a:solidFill>
+                <a:latin typeface="Arial"/>
+              </a:rPr>
+              <a:t>★ TRỤ CỘT 3 (Word Nghị định 30 &amp; Thư viện):</a:t>
+            </a:r>
+            <a:r>
+              <a:rPr sz="950">
+                <a:solidFill>
+                  <a:srgbClr val="0F172A"/>
+                </a:solidFill>
+                <a:latin typeface="Arial"/>
+              </a:rPr>
+              <a:t> Xuất Word chuẩn quy cách in ấn ký duyệt BGH; lưu trữ thư viện số bảo mật 100% trên máy tính cô giáo.</a:t>
             </a:r>
           </a:p>
         </p:txBody>
@@ -3406,8 +3579,8 @@
         </p:nvSpPr>
         <p:spPr>
           <a:xfrm>
-            <a:off x="7680960" y="4937760"/>
-            <a:ext cx="6583680" cy="27066240"/>
+            <a:off x="9558000" y="4680000"/>
+            <a:ext cx="8424000" cy="23940000"/>
           </a:xfrm>
           <a:prstGeom prst="roundRect">
             <a:avLst/>
@@ -3415,9 +3588,9 @@
           <a:solidFill>
             <a:srgbClr val="FFFFFF"/>
           </a:solidFill>
-          <a:ln w="31750">
+          <a:ln w="25400">
             <a:solidFill>
-              <a:srgbClr val="0284C7"/>
+              <a:srgbClr val="4338CA"/>
             </a:solidFill>
           </a:ln>
         </p:spPr>
@@ -3436,122 +3609,229 @@
           </a:fontRef>
         </p:style>
         <p:txBody>
-          <a:bodyPr rtlCol="0" anchor="ctr" wrap="square" lIns="365760" rIns="365760" tIns="365760"/>
+          <a:bodyPr rtlCol="0" anchor="ctr" wrap="square" lIns="324000" rIns="324000" tIns="324000"/>
           <a:lstStyle/>
           <a:p>
             <a:pPr algn="ctr">
               <a:spcAft>
-                <a:spcPts val="1400"/>
+                <a:spcPts val="800"/>
               </a:spcAft>
-              <a:defRPr sz="1800" b="1">
-                <a:solidFill>
-                  <a:srgbClr val="0284C7"/>
+              <a:defRPr sz="1400" b="1">
+                <a:solidFill>
+                  <a:srgbClr val="4338CA"/>
                 </a:solidFill>
                 <a:latin typeface="Arial"/>
               </a:defRPr>
             </a:pPr>
             <a:r>
-              <a:t>II. GIẢI PHÁP CÔNG NGHỆ KID-LESSON AI</a:t>
+              <a:t>TRIỂN KHAI THỰC TẾ &amp; TÍNH BỀN VỮNG</a:t>
             </a:r>
           </a:p>
           <a:p>
             <a:pPr>
               <a:spcAft>
-                <a:spcPts val="1200"/>
+                <a:spcPts val="400"/>
               </a:spcAft>
             </a:pPr>
             <a:r>
-              <a:rPr b="1" sz="1300">
+              <a:rPr b="1" sz="1000">
                 <a:solidFill>
                   <a:srgbClr val="0284C7"/>
                 </a:solidFill>
                 <a:latin typeface="Arial"/>
               </a:rPr>
-              <a:t>★ Phân hệ 1: Soạn Kế hoạch bài dạy 5 bước:</a:t>
-            </a:r>
-            <a:r>
-              <a:rPr sz="1300">
-                <a:solidFill>
-                  <a:srgbClr val="1E293B"/>
-                </a:solidFill>
-                <a:latin typeface="Arial"/>
-              </a:rPr>
-              <a:t> Tự động tạo giáo án chuẩn mực 3 Mục tiêu (Kiến thức - Kỹ năng - Thái độ) và Tiến trình 3 bước lôi cuốn bám sát Thông tư 51/2020/TT-BGDĐT.</a:t>
+              <a:t>PHẦN 3: TRIỂN KHAI THỰC TẾ (Trang 6):</a:t>
             </a:r>
           </a:p>
           <a:p>
             <a:pPr>
               <a:spcAft>
-                <a:spcPts val="1200"/>
+                <a:spcPts val="400"/>
               </a:spcAft>
             </a:pPr>
             <a:r>
-              <a:rPr b="1" sz="1300">
+              <a:rPr b="1" sz="1000">
                 <a:solidFill>
                   <a:srgbClr val="0284C7"/>
                 </a:solidFill>
                 <a:latin typeface="Arial"/>
               </a:rPr>
-              <a:t>★ Phân hệ 2: Sáng tác Thơ &amp; Câu đố mới:</a:t>
-            </a:r>
-            <a:r>
-              <a:rPr sz="1300">
-                <a:solidFill>
-                  <a:srgbClr val="1E293B"/>
-                </a:solidFill>
-                <a:latin typeface="Arial"/>
-              </a:rPr>
-              <a:t> Sáng tác tức thì các bài thơ 4 chữ, 5 chữ gieo vần vui tươi theo chủ đề và câu đố tư duy giúp tiết học hấp dẫn ngay từ phút đầu tiên.</a:t>
+              <a:t>• Địa bàn áp dụng:</a:t>
+            </a:r>
+            <a:r>
+              <a:rPr sz="950">
+                <a:solidFill>
+                  <a:srgbClr val="0F172A"/>
+                </a:solidFill>
+                <a:latin typeface="Arial"/>
+              </a:rPr>
+              <a:t> Trường Mầm non Phúc Sơn B, Xã Phúc Sơn, TP. Hà Nội.</a:t>
             </a:r>
           </a:p>
           <a:p>
             <a:pPr>
               <a:spcAft>
-                <a:spcPts val="1200"/>
+                <a:spcPts val="400"/>
               </a:spcAft>
             </a:pPr>
             <a:r>
-              <a:rPr b="1" sz="1300">
+              <a:rPr b="1" sz="1000">
                 <a:solidFill>
                   <a:srgbClr val="0284C7"/>
                 </a:solidFill>
                 <a:latin typeface="Arial"/>
               </a:rPr>
-              <a:t>★ Phân hệ 3: Tự động hóa Thiết kế Đồ dùng số:</a:t>
-            </a:r>
-            <a:r>
-              <a:rPr sz="1300">
-                <a:solidFill>
-                  <a:srgbClr val="1E293B"/>
-                </a:solidFill>
-                <a:latin typeface="Arial"/>
-              </a:rPr>
-              <a:t> Ứng dụng Prompt AI tạo sinh thẻ tranh Flashcard sắc nét, tranh tô màu và trò chơi tương tác đa điểm chạm trên Canva với chi phí 0 đồng.</a:t>
+              <a:t>• 4 Khối lớp thực nghiệm:</a:t>
+            </a:r>
+            <a:r>
+              <a:rPr sz="950">
+                <a:solidFill>
+                  <a:srgbClr val="0F172A"/>
+                </a:solidFill>
+                <a:latin typeface="Arial"/>
+              </a:rPr>
+              <a:t> Nhà trẻ (24–36th), MG bé (3–4t), MG nhỡ (4–5t), MG lớn (5–6t).</a:t>
             </a:r>
           </a:p>
           <a:p>
             <a:pPr>
               <a:spcAft>
-                <a:spcPts val="1200"/>
+                <a:spcPts val="400"/>
               </a:spcAft>
             </a:pPr>
             <a:r>
-              <a:rPr b="1" sz="1300">
+              <a:rPr b="1" sz="1000">
                 <a:solidFill>
                   <a:srgbClr val="0284C7"/>
                 </a:solidFill>
                 <a:latin typeface="Arial"/>
               </a:rPr>
-              <a:t>★ Quy trình 3 bước siêu tốc:</a:t>
-            </a:r>
-            <a:r>
-              <a:rPr sz="1300">
-                <a:solidFill>
-                  <a:srgbClr val="1E293B"/>
-                </a:solidFill>
-                <a:latin typeface="Arial"/>
-              </a:rPr>
-              <a:t> Nhập chủ đề/độ tuổi -&gt; AI sinh trọn bộ bài dạy trong 30 giây -&gt; Giáo viên duyệt và trình chiếu lên màn hình lớp học.</a:t>
+              <a:t>• Quy mô tham gia:</a:t>
+            </a:r>
+            <a:r>
+              <a:rPr sz="950">
+                <a:solidFill>
+                  <a:srgbClr val="0F172A"/>
+                </a:solidFill>
+                <a:latin typeface="Arial"/>
+              </a:rPr>
+              <a:t> Hơn 100 trẻ mầm non tham gia theo dõi thực nghiệm.</a:t>
+            </a:r>
+          </a:p>
+          <a:p>
+            <a:pPr>
+              <a:spcAft>
+                <a:spcPts val="400"/>
+              </a:spcAft>
+            </a:pPr>
+            <a:r>
+              <a:rPr b="1" sz="1000">
+                <a:solidFill>
+                  <a:srgbClr val="0284C7"/>
+                </a:solidFill>
+                <a:latin typeface="Arial"/>
+              </a:rPr>
+              <a:t>• Thiết bị sử dụng:</a:t>
+            </a:r>
+            <a:r>
+              <a:rPr sz="950">
+                <a:solidFill>
+                  <a:srgbClr val="0F172A"/>
+                </a:solidFill>
+                <a:latin typeface="Arial"/>
+              </a:rPr>
+              <a:t> Điện thoại GV, máy tính lớp học, Smart TV internet sẵn có.</a:t>
+            </a:r>
+          </a:p>
+          <a:p>
+            <a:pPr>
+              <a:spcAft>
+                <a:spcPts val="400"/>
+              </a:spcAft>
+            </a:pPr>
+            <a:r>
+              <a:rPr b="1" sz="1000">
+                <a:solidFill>
+                  <a:srgbClr val="0284C7"/>
+                </a:solidFill>
+                <a:latin typeface="Arial"/>
+              </a:rPr>
+              <a:t>PHẦN 5: TÍNH BỀN VỮNG &amp; NHÂN RỘNG (Trang 8):</a:t>
+            </a:r>
+          </a:p>
+          <a:p>
+            <a:pPr>
+              <a:spcAft>
+                <a:spcPts val="400"/>
+              </a:spcAft>
+            </a:pPr>
+            <a:r>
+              <a:rPr b="1" sz="1000">
+                <a:solidFill>
+                  <a:srgbClr val="10B981"/>
+                </a:solidFill>
+                <a:latin typeface="Arial"/>
+              </a:rPr>
+              <a:t>✓ Chi phí vận hành 0 đồng:</a:t>
+            </a:r>
+            <a:r>
+              <a:rPr sz="950">
+                <a:solidFill>
+                  <a:srgbClr val="0F172A"/>
+                </a:solidFill>
+                <a:latin typeface="Arial"/>
+              </a:rPr>
+              <a:t> Tận dụng Canva for Education, Google Gemini &amp; Web Speech API miễn phí; không tốn phí bản quyền hay server.</a:t>
+            </a:r>
+          </a:p>
+          <a:p>
+            <a:pPr>
+              <a:spcAft>
+                <a:spcPts val="400"/>
+              </a:spcAft>
+            </a:pPr>
+            <a:r>
+              <a:rPr b="1" sz="1000">
+                <a:solidFill>
+                  <a:srgbClr val="10B981"/>
+                </a:solidFill>
+                <a:latin typeface="Arial"/>
+              </a:rPr>
+              <a:t>✓ Khả năng nhân rộng cao:</a:t>
+            </a:r>
+            <a:r>
+              <a:rPr sz="950">
+                <a:solidFill>
+                  <a:srgbClr val="0F172A"/>
+                </a:solidFill>
+                <a:latin typeface="Arial"/>
+              </a:rPr>
+              <a:t> Đóng gói 'Sổ tay 3 bước ứng dụng AI', tập huấn 30 phút là GV mọi độ tuổi làm chủ; sẵn sàng chuyển giao 100% trường bạn.</a:t>
+            </a:r>
+          </a:p>
+          <a:p>
+            <a:pPr>
+              <a:spcAft>
+                <a:spcPts val="400"/>
+              </a:spcAft>
+            </a:pPr>
+            <a:r>
+              <a:rPr b="1" sz="1000">
+                <a:solidFill>
+                  <a:srgbClr val="10B981"/>
+                </a:solidFill>
+                <a:latin typeface="Arial"/>
+              </a:rPr>
+              <a:t>✓ Không cần máy móc chuyên dụng:</a:t>
+            </a:r>
+            <a:r>
+              <a:rPr sz="950">
+                <a:solidFill>
+                  <a:srgbClr val="0F172A"/>
+                </a:solidFill>
+                <a:latin typeface="Arial"/>
+              </a:rPr>
+              <a:t> Hoạt động mượt mà trên máy tính, TV sẵn có; Web App nhẹ nhàng, chạy tốt cả offline mạng LAN.</a:t>
             </a:r>
           </a:p>
         </p:txBody>
@@ -3564,8 +3844,8 @@
         </p:nvSpPr>
         <p:spPr>
           <a:xfrm>
-            <a:off x="14630400" y="4937760"/>
-            <a:ext cx="6583680" cy="27066240"/>
+            <a:off x="18576000" y="4680000"/>
+            <a:ext cx="8424000" cy="23940000"/>
           </a:xfrm>
           <a:prstGeom prst="roundRect">
             <a:avLst/>
@@ -3575,7 +3855,7 @@
           </a:solidFill>
           <a:ln>
             <a:solidFill>
-              <a:srgbClr val="E2E8F0"/>
+              <a:srgbClr val="CBD5E1"/>
             </a:solidFill>
           </a:ln>
         </p:spPr>
@@ -3594,14 +3874,14 @@
           </a:fontRef>
         </p:style>
         <p:txBody>
-          <a:bodyPr rtlCol="0" anchor="ctr" wrap="square" lIns="365760" rIns="365760" tIns="365760"/>
+          <a:bodyPr rtlCol="0" anchor="ctr" wrap="square" lIns="324000" rIns="324000" tIns="324000"/>
           <a:lstStyle/>
           <a:p>
             <a:pPr algn="ctr">
               <a:spcAft>
-                <a:spcPts val="1400"/>
+                <a:spcPts val="800"/>
               </a:spcAft>
-              <a:defRPr sz="1800" b="1">
+              <a:defRPr sz="1400" b="1">
                 <a:solidFill>
                   <a:srgbClr val="10B981"/>
                 </a:solidFill>
@@ -3609,136 +3889,323 @@
               </a:defRPr>
             </a:pPr>
             <a:r>
-              <a:t>III. TÁC ĐỘNG THỰC TẾ &amp; NHÂN RỘNG</a:t>
+              <a:t>KẾT QUẢ TÁC ĐỘNG &amp; ĐỊNH HƯỚNG PHÁT TRIỂN</a:t>
             </a:r>
           </a:p>
           <a:p>
             <a:pPr>
               <a:spcAft>
-                <a:spcPts val="1200"/>
+                <a:spcPts val="400"/>
               </a:spcAft>
             </a:pPr>
             <a:r>
-              <a:rPr b="1" sz="1300">
-                <a:solidFill>
-                  <a:srgbClr val="10B981"/>
-                </a:solidFill>
-                <a:latin typeface="Arial"/>
-              </a:rPr>
-              <a:t>✓ Giảm 80% thời gian soạn bài:</a:t>
-            </a:r>
-            <a:r>
-              <a:rPr sz="1300">
-                <a:solidFill>
-                  <a:srgbClr val="1E293B"/>
-                </a:solidFill>
-                <a:latin typeface="Arial"/>
-              </a:rPr>
-              <a:t> Thời gian chuẩn bị bài giảng của giáo viên giảm từ 14h/tuần xuống chỉ còn 2.8h/tuần.</a:t>
+              <a:rPr b="1" sz="1000">
+                <a:solidFill>
+                  <a:srgbClr val="0284C7"/>
+                </a:solidFill>
+                <a:latin typeface="Arial"/>
+              </a:rPr>
+              <a:t>PHẦN 4: KẾT QUẢ VÀ TÁC ĐỘNG NỔI BẬT (Trang 7):</a:t>
             </a:r>
           </a:p>
           <a:p>
             <a:pPr>
               <a:spcAft>
-                <a:spcPts val="1200"/>
+                <a:spcPts val="400"/>
               </a:spcAft>
             </a:pPr>
             <a:r>
-              <a:rPr b="1" sz="1300">
+              <a:rPr b="1" sz="1000">
                 <a:solidFill>
                   <a:srgbClr val="10B981"/>
                 </a:solidFill>
                 <a:latin typeface="Arial"/>
               </a:rPr>
-              <a:t>✓ 100% tiết dạy có học liệu số trực quan:</a:t>
-            </a:r>
-            <a:r>
-              <a:rPr sz="1300">
-                <a:solidFill>
-                  <a:srgbClr val="1E293B"/>
-                </a:solidFill>
-                <a:latin typeface="Arial"/>
-              </a:rPr>
-              <a:t> Trẻ được tiếp cận tranh ảnh sắc nét, thơ ca mới lạ mỗi ngày.</a:t>
+              <a:t>• Thời gian soạn Kế hoạch bài dạy:</a:t>
+            </a:r>
+            <a:r>
+              <a:rPr sz="950">
+                <a:solidFill>
+                  <a:srgbClr val="0F172A"/>
+                </a:solidFill>
+                <a:latin typeface="Arial"/>
+              </a:rPr>
+              <a:t> 12 - 14 h/tuần ➔ 2 - 2.5 h/tuần [GIẢM 83.3%]</a:t>
             </a:r>
           </a:p>
           <a:p>
             <a:pPr>
               <a:spcAft>
-                <a:spcPts val="1200"/>
+                <a:spcPts val="400"/>
               </a:spcAft>
             </a:pPr>
             <a:r>
-              <a:rPr b="1" sz="1300">
+              <a:rPr b="1" sz="1000">
                 <a:solidFill>
                   <a:srgbClr val="10B981"/>
                 </a:solidFill>
                 <a:latin typeface="Arial"/>
               </a:rPr>
-              <a:t>✓ 95.8% trẻ hào hứng, tập trung:</a:t>
-            </a:r>
-            <a:r>
-              <a:rPr sz="1300">
-                <a:solidFill>
-                  <a:srgbClr val="1E293B"/>
-                </a:solidFill>
-                <a:latin typeface="Arial"/>
-              </a:rPr>
-              <a:t> Tiết học sinh động giúp trẻ phát triển ngôn ngữ và tư duy vượt bậc.</a:t>
+              <a:t>• Thời gian chuyển Giáo án sang Slide:</a:t>
+            </a:r>
+            <a:r>
+              <a:rPr sz="950">
+                <a:solidFill>
+                  <a:srgbClr val="0F172A"/>
+                </a:solidFill>
+                <a:latin typeface="Arial"/>
+              </a:rPr>
+              <a:t> 45 - 60 phút/bài ➔ 5 - 10 phút/bài [TỰ ĐỘNG HÓA 93%]</a:t>
             </a:r>
           </a:p>
           <a:p>
             <a:pPr>
               <a:spcAft>
-                <a:spcPts val="1200"/>
+                <a:spcPts val="400"/>
               </a:spcAft>
             </a:pPr>
             <a:r>
-              <a:rPr b="1" sz="1300">
+              <a:rPr b="1" sz="1000">
                 <a:solidFill>
                   <a:srgbClr val="10B981"/>
                 </a:solidFill>
                 <a:latin typeface="Arial"/>
               </a:rPr>
-              <a:t>✓ Chi phí 0 đồng - Nhân rộng dễ dàng:</a:t>
-            </a:r>
-            <a:r>
-              <a:rPr sz="1300">
-                <a:solidFill>
-                  <a:srgbClr val="1E293B"/>
-                </a:solidFill>
-                <a:latin typeface="Arial"/>
-              </a:rPr>
-              <a:t> Vận hành trên phiên bản giáo dục miễn phí của Gemini và Canva; tập huấn 30 phút là giáo viên dùng được ngay.</a:t>
+              <a:t>• Tỷ lệ GV trong Tổ làm chủ CN:</a:t>
+            </a:r>
+            <a:r>
+              <a:rPr sz="950">
+                <a:solidFill>
+                  <a:srgbClr val="0F172A"/>
+                </a:solidFill>
+                <a:latin typeface="Arial"/>
+              </a:rPr>
+              <a:t> 0% ➔ 100% [100% TỔ CHUYÊN MÔN]</a:t>
             </a:r>
           </a:p>
           <a:p>
             <a:pPr>
               <a:spcAft>
-                <a:spcPts val="1200"/>
+                <a:spcPts val="400"/>
               </a:spcAft>
             </a:pPr>
             <a:r>
-              <a:rPr b="1" sz="1300">
+              <a:rPr b="1" sz="1000">
                 <a:solidFill>
                   <a:srgbClr val="10B981"/>
                 </a:solidFill>
                 <a:latin typeface="Arial"/>
               </a:rPr>
-              <a:t>✓ Cam kết Đạo đức AI (Responsible AI):</a:t>
-            </a:r>
-            <a:r>
-              <a:rPr sz="1300">
-                <a:solidFill>
-                  <a:srgbClr val="1E293B"/>
-                </a:solidFill>
-                <a:latin typeface="Arial"/>
-              </a:rPr>
-              <a:t> Thực hiện nguyên tắc Human-in-the-Loop, giáo viên là người duyệt cuối cùng, kiểm soát tuyệt đối an toàn nội dung cho trẻ em.</a:t>
-            </a:r>
-          </a:p>
-        </p:txBody>
-      </p:sp>
+              <a:t>• Độ đồng bộ Giáo án &amp; Slide:</a:t>
+            </a:r>
+            <a:r>
+              <a:rPr sz="950">
+                <a:solidFill>
+                  <a:srgbClr val="0F172A"/>
+                </a:solidFill>
+                <a:latin typeface="Arial"/>
+              </a:rPr>
+              <a:t> Rời rạc, thiếu đồng bộ ➔ Đồng bộ tự động [CHUẨN HÓA THỐNG NHẤT]</a:t>
+            </a:r>
+          </a:p>
+          <a:p>
+            <a:pPr>
+              <a:spcAft>
+                <a:spcPts val="400"/>
+              </a:spcAft>
+            </a:pPr>
+            <a:r>
+              <a:rPr b="1" sz="1000">
+                <a:solidFill>
+                  <a:srgbClr val="0284C7"/>
+                </a:solidFill>
+                <a:latin typeface="Arial"/>
+              </a:rPr>
+              <a:t>PHẦN 6: ĐỊNH HƯỚNG PHÁT TRIỂN TIẾP THEO (Trang 9):</a:t>
+            </a:r>
+          </a:p>
+          <a:p>
+            <a:pPr>
+              <a:spcAft>
+                <a:spcPts val="400"/>
+              </a:spcAft>
+            </a:pPr>
+            <a:r>
+              <a:rPr b="1" sz="1000">
+                <a:solidFill>
+                  <a:srgbClr val="0284C7"/>
+                </a:solidFill>
+                <a:latin typeface="Arial"/>
+              </a:rPr>
+              <a:t>• GĐ 1 (Ngân hàng 100+ Prompt):</a:t>
+            </a:r>
+            <a:r>
+              <a:rPr sz="950">
+                <a:solidFill>
+                  <a:srgbClr val="0F172A"/>
+                </a:solidFill>
+                <a:latin typeface="Arial"/>
+              </a:rPr>
+              <a:t> Chuẩn hóa kịch bản theo 6 chủ đề năm học (Trường MN, Bản thân, Gia đình, Nghề nghiệp, Thực vật, Động vật).</a:t>
+            </a:r>
+          </a:p>
+          <a:p>
+            <a:pPr>
+              <a:spcAft>
+                <a:spcPts val="400"/>
+              </a:spcAft>
+            </a:pPr>
+            <a:r>
+              <a:rPr b="1" sz="1000">
+                <a:solidFill>
+                  <a:srgbClr val="0284C7"/>
+                </a:solidFill>
+                <a:latin typeface="Arial"/>
+              </a:rPr>
+              <a:t>• GĐ 2 (Studio Đa phương tiện):</a:t>
+            </a:r>
+            <a:r>
+              <a:rPr sz="950">
+                <a:solidFill>
+                  <a:srgbClr val="0F172A"/>
+                </a:solidFill>
+                <a:latin typeface="Arial"/>
+              </a:rPr>
+              <a:t> Tích hợp video hoạt họa AI 1–2 phút, tự động phối nhạc bài thơ và 5 mini-game tương tác trên Smart TV.</a:t>
+            </a:r>
+          </a:p>
+          <a:p>
+            <a:pPr>
+              <a:spcAft>
+                <a:spcPts val="400"/>
+              </a:spcAft>
+            </a:pPr>
+            <a:r>
+              <a:rPr b="1" sz="1000">
+                <a:solidFill>
+                  <a:srgbClr val="0284C7"/>
+                </a:solidFill>
+                <a:latin typeface="Arial"/>
+              </a:rPr>
+              <a:t>• GĐ 3 (Chuyển giao toàn huyện):</a:t>
+            </a:r>
+            <a:r>
+              <a:rPr sz="950">
+                <a:solidFill>
+                  <a:srgbClr val="0F172A"/>
+                </a:solidFill>
+                <a:latin typeface="Arial"/>
+              </a:rPr>
+              <a:t> Nhân rộng tới 100% trường mầm non trong huyện; tổ chức hội thảo chia sẻ ứng dụng AI nhân văn trong GDMN.</a:t>
+            </a:r>
+          </a:p>
+        </p:txBody>
+      </p:sp>
+      <p:sp>
+        <p:nvSpPr>
+          <p:cNvPr id="7" name="Rectangle 6"/>
+          <p:cNvSpPr/>
+          <p:nvPr/>
+        </p:nvSpPr>
+        <p:spPr>
+          <a:xfrm>
+            <a:off x="540000" y="28980000"/>
+            <a:ext cx="26820000" cy="1728000"/>
+          </a:xfrm>
+          <a:prstGeom prst="rect">
+            <a:avLst/>
+          </a:prstGeom>
+          <a:solidFill>
+            <a:srgbClr val="1E1B4B"/>
+          </a:solidFill>
+          <a:ln>
+            <a:solidFill>
+              <a:srgbClr val="F59E0B"/>
+            </a:solidFill>
+          </a:ln>
+        </p:spPr>
+        <p:style>
+          <a:lnRef idx="1">
+            <a:schemeClr val="accent1"/>
+          </a:lnRef>
+          <a:fillRef idx="3">
+            <a:schemeClr val="accent1"/>
+          </a:fillRef>
+          <a:effectRef idx="2">
+            <a:schemeClr val="accent1"/>
+          </a:effectRef>
+          <a:fontRef idx="minor">
+            <a:schemeClr val="lt1"/>
+          </a:fontRef>
+        </p:style>
+        <p:txBody>
+          <a:bodyPr rtlCol="0" anchor="ctr" wrap="square" lIns="432000" rIns="1980000"/>
+          <a:lstStyle/>
+          <a:p>
+            <a:pPr algn="ctr">
+              <a:defRPr sz="1150" b="1">
+                <a:solidFill>
+                  <a:srgbClr val="F59E0B"/>
+                </a:solidFill>
+                <a:latin typeface="Arial"/>
+              </a:defRPr>
+            </a:pPr>
+            <a:r>
+              <a:t>TRƯỜNG MẦM NON PHÚC SƠN B  •  THÔN ĐỒNG MÍT, XÃ PHÚC SƠN, TP HÀ NỘI</a:t>
+            </a:r>
+          </a:p>
+          <a:p>
+            <a:pPr>
+              <a:defRPr sz="1050">
+                <a:solidFill>
+                  <a:srgbClr val="FFFFFF"/>
+                </a:solidFill>
+                <a:latin typeface="Arial"/>
+              </a:defRPr>
+            </a:pPr>
+            <a:r>
+              <a:t>DIỄN ĐÀN ĐỔI MỚI SÁNG TẠO GIÁO DỤC VIỆT NAM VỚI AI • GIẢI THƯỞNG TIÊN PHONG ỨNG DỤNG AI TRONG GIÁO DỤC VIỆT NAM 2026</a:t>
+            </a:r>
+          </a:p>
+          <a:p>
+            <a:pPr>
+              <a:defRPr sz="1050">
+                <a:solidFill>
+                  <a:srgbClr val="E2E8F0"/>
+                </a:solidFill>
+                <a:latin typeface="Arial"/>
+              </a:defRPr>
+            </a:pPr>
+            <a:r>
+              <a:t>🌐 Đường dẫn tới app: https://annethanks.github.io/kid-lesson-ai/  |  📱 Quét mã QR bên cạnh để truy cập trực tiếp ứng dụng</a:t>
+            </a:r>
+          </a:p>
+        </p:txBody>
+      </p:sp>
+      <p:pic>
+        <p:nvPicPr>
+          <p:cNvPr id="8" name="Picture 7" descr="QR_Code_KID_LESSON_AI.png"/>
+          <p:cNvPicPr>
+            <a:picLocks noChangeAspect="1"/>
+          </p:cNvPicPr>
+          <p:nvPr/>
+        </p:nvPicPr>
+        <p:blipFill>
+          <a:blip r:embed="rId2"/>
+          <a:stretch>
+            <a:fillRect/>
+          </a:stretch>
+        </p:blipFill>
+        <p:spPr>
+          <a:xfrm>
+            <a:off x="25560000" y="29052000"/>
+            <a:ext cx="1584000" cy="1584000"/>
+          </a:xfrm>
+          <a:prstGeom prst="rect">
+            <a:avLst/>
+          </a:prstGeom>
+        </p:spPr>
+      </p:pic>
     </p:spTree>
   </p:cSld>
   <p:clrMapOvr>
